--- a/slides/DataQuality-RA2026.pptx
+++ b/slides/DataQuality-RA2026.pptx
@@ -17337,7 +17337,7 @@
                 </a:solidFill>
                 <a:latin typeface="Consolas"/>
               </a:rPr>
-              <a:t>git clone https://github.com/dataroots/rootsacademy-2026-data-quality.git
+              <a:t>git clone https://github.com/eyaakrimi/rootsacademy-2026-data-quality.git
 cd rootsacademy-2026-data-quality
 # Choose one:
 uv sync                       # ← fastest
@@ -21530,7 +21530,7 @@
                 </a:solidFill>
                 <a:latin typeface="Calibri"/>
               </a:rPr>
-              <a:t>github.com/dataroots/rootsacademy-2026-data-quality</a:t>
+              <a:t>github.com/eyaakrimi/rootsacademy-2026-data-quality</a:t>
             </a:r>
           </a:p>
         </p:txBody>
